--- a/public/fun/pack/pptx/talkpro/발표템플릿프리미엄_48_업무보고_일렉트릭바이올렛.pptx
+++ b/public/fun/pack/pptx/talkpro/발표템플릿프리미엄_48_업무보고_일렉트릭바이올렛.pptx
@@ -115,12 +115,12 @@
   <p:extLst>
     <p:ext uri="{521415D9-36F7-43E2-AB2F-B90AF26B5E84}">
       <p14:sectionLst xmlns:p14="http://schemas.microsoft.com/office/powerpoint/2010/main">
-        <p14:section name="시작" id="{B7C370B0-FB61-434D-833A-EB81C249BCB7}">
+        <p14:section name="시작" id="{6BE60E7F-86AA-4463-82EE-383B8CEB4B14}">
           <p14:sldIdLst>
             <p14:sldId id="256"/>
           </p14:sldIdLst>
         </p14:section>
-        <p14:section name="본문" id="{497DF53F-5CB4-4483-B85A-F78E41A1EEA2}">
+        <p14:section name="본문" id="{18334DC2-AD1D-498F-9B4F-DC6CE16FFEEB}">
           <p14:sldIdLst>
             <p14:sldId id="257"/>
             <p14:sldId id="258"/>
@@ -131,7 +131,7 @@
             <p14:sldId id="263"/>
           </p14:sldIdLst>
         </p14:section>
-        <p14:section name="마무리" id="{D2E50746-2DE9-499E-B46C-E5B79FB3DCB5}">
+        <p14:section name="마무리" id="{B893D020-2572-45CE-8B35-6C9CF9529785}">
           <p14:sldIdLst>
             <p14:sldId id="264"/>
           </p14:sldIdLst>
@@ -3106,7 +3106,7 @@
             </a:lvl1pPr>
           </a:lstStyle>
           <a:p>
-            <a:fld id="{9C7FB404-7E76-481F-99BF-EE9DD5DD6B6F}" type="slidenum">
+            <a:fld id="{4007EC97-07A6-4D46-BA38-65AA11CCE0A6}" type="slidenum">
               <a:rPr lang="en-US"/>
               <a:t>‹#›</a:t>
             </a:fld>
@@ -4937,7 +4937,7 @@
             </a:lvl1pPr>
           </a:lstStyle>
           <a:p>
-            <a:fld id="{A8FE7A76-D9E2-4A14-A7CD-57FA93EF948D}" type="slidenum">
+            <a:fld id="{6446FF67-533B-4704-B2B8-95E6D935BF12}" type="slidenum">
               <a:rPr lang="en-US"/>
               <a:t>‹#›</a:t>
             </a:fld>
@@ -5566,7 +5566,7 @@
             </a:lvl1pPr>
           </a:lstStyle>
           <a:p>
-            <a:fld id="{ECF0C705-D3DD-4E5A-9A8B-33AF57981DF8}" type="slidenum">
+            <a:fld id="{A6CCA6D3-8997-4297-97D6-813E5646428F}" type="slidenum">
               <a:rPr lang="en-US"/>
               <a:t>‹#›</a:t>
             </a:fld>
@@ -6397,7 +6397,7 @@
           <a:p>
             <a:r>
               <a:rPr lang="ko-KR"/>
-              <a:t>새해 첫 주간 업무 보고입니다</a:t>
+              <a:t>이번 주간 업무 보고입니다</a:t>
             </a:r>
           </a:p>
         </p:txBody>
@@ -6425,7 +6425,7 @@
           <a:p>
             <a:r>
               <a:rPr lang="ko-KR"/>
-              <a:t>0000. 00. 00</a:t>
+              <a:t>날짜 입력</a:t>
             </a:r>
           </a:p>
         </p:txBody>
@@ -6510,7 +6510,7 @@
           <a:bodyPr/>
           <a:lstStyle/>
           <a:p>
-            <a:fld id="{CA0BBEB7-3ABA-40D6-B46B-FD8B4D9D0324}" type="slidenum">
+            <a:fld id="{0374D11D-E720-4D64-B087-60403E28B8FD}" type="slidenum">
               <a:rPr lang="en-US"/>
               <a:t>‹#›</a:t>
             </a:fld>
@@ -7624,7 +7624,7 @@
           <a:bodyPr/>
           <a:lstStyle/>
           <a:p>
-            <a:fld id="{1548BF03-7B03-4204-8939-5C3BBAE4D7F0}" type="slidenum">
+            <a:fld id="{DC56FC5B-B7F3-4EC6-B3DB-8DA2DA0224B4}" type="slidenum">
               <a:rPr lang="en-US"/>
               <a:t>‹#›</a:t>
             </a:fld>
@@ -7712,7 +7712,7 @@
           <a:bodyPr/>
           <a:lstStyle/>
           <a:p>
-            <a:fld id="{272D1B69-6B37-46B4-97DD-E22E3FD3E659}" type="slidenum">
+            <a:fld id="{DD503410-07B0-4937-A476-F957D83F046C}" type="slidenum">
               <a:rPr lang="en-US"/>
               <a:t>‹#›</a:t>
             </a:fld>
@@ -8619,7 +8619,7 @@
           <a:bodyPr/>
           <a:lstStyle/>
           <a:p>
-            <a:fld id="{EF3368EF-E82B-4741-80ED-C6A13F66A337}" type="slidenum">
+            <a:fld id="{9F202303-8B41-4562-BFBC-54F1C442B286}" type="slidenum">
               <a:rPr lang="en-US"/>
               <a:t>‹#›</a:t>
             </a:fld>
@@ -9223,7 +9223,7 @@
           <a:bodyPr/>
           <a:lstStyle/>
           <a:p>
-            <a:fld id="{0BC6DB15-BDDF-4F98-8BD2-AE821C330181}" type="slidenum">
+            <a:fld id="{5FB12128-3295-4E8B-8EE4-3A01BCCE2937}" type="slidenum">
               <a:rPr lang="en-US"/>
               <a:t>‹#›</a:t>
             </a:fld>
@@ -9403,7 +9403,7 @@
           <a:bodyPr/>
           <a:lstStyle/>
           <a:p>
-            <a:fld id="{79146310-0DF6-4EC9-8544-F948005A63F9}" type="slidenum">
+            <a:fld id="{FF09F91B-DB4E-4EEA-9AF6-C2AE419C306E}" type="slidenum">
               <a:rPr lang="en-US"/>
               <a:t>‹#›</a:t>
             </a:fld>
@@ -10467,7 +10467,7 @@
           <a:bodyPr/>
           <a:lstStyle/>
           <a:p>
-            <a:fld id="{01D08B20-4431-4BD8-BC9D-B6151FB631CA}" type="slidenum">
+            <a:fld id="{200C53D9-B2A5-4D67-A4F8-D3356521F320}" type="slidenum">
               <a:rPr lang="en-US"/>
               <a:t>‹#›</a:t>
             </a:fld>
